--- a/fixtures/nested.pptx
+++ b/fixtures/nested.pptx
@@ -65,7 +65,7 @@
         <p:txBody>
           <a:bodyPr/>
           <a:p>
-            <a:fld id="{80137553-9B86-4AD0-8CF0-0CD3B3154204}" type="slidenum">
+            <a:fld id="{8E0FD309-3A34-400C-8AA3-1D6B19D73EF4}" type="slidenum">
               <a:t>&lt;#&gt;</a:t>
             </a:fld>
           </a:p>
@@ -274,7 +274,7 @@
         <p:txBody>
           <a:bodyPr/>
           <a:p>
-            <a:fld id="{4DD16C74-980B-4E45-8BC9-87F5027B96A1}" type="slidenum">
+            <a:fld id="{ED3E80DE-FA04-4D45-999C-127B1C782D7E}" type="slidenum">
               <a:t>&lt;#&gt;</a:t>
             </a:fld>
           </a:p>
@@ -569,7 +569,7 @@
         <p:txBody>
           <a:bodyPr/>
           <a:p>
-            <a:fld id="{B4345131-05F0-4575-A65C-73B8C096F0B5}" type="slidenum">
+            <a:fld id="{4FB39BA7-5E32-49DB-95B8-8A99FCD7DD57}" type="slidenum">
               <a:t>&lt;#&gt;</a:t>
             </a:fld>
           </a:p>
@@ -950,7 +950,7 @@
         <p:txBody>
           <a:bodyPr/>
           <a:p>
-            <a:fld id="{D01739CF-FA06-49F4-B9FA-7A6FC3228F43}" type="slidenum">
+            <a:fld id="{2C99BB38-D8D9-4330-A87C-CE5BE3E04EE7}" type="slidenum">
               <a:t>&lt;#&gt;</a:t>
             </a:fld>
           </a:p>
@@ -1113,7 +1113,7 @@
         <p:txBody>
           <a:bodyPr/>
           <a:p>
-            <a:fld id="{4D25D8A6-E3A5-4328-9A74-72482D8A9819}" type="slidenum">
+            <a:fld id="{D76DE987-1A74-4465-8FEF-392DFDD9ACEE}" type="slidenum">
               <a:t>&lt;#&gt;</a:t>
             </a:fld>
           </a:p>
@@ -1279,7 +1279,7 @@
         <p:txBody>
           <a:bodyPr/>
           <a:p>
-            <a:fld id="{03C09189-8373-4CD2-8D38-848AEB363A69}" type="slidenum">
+            <a:fld id="{FF22B709-6454-4169-B73E-F5CB5278880B}" type="slidenum">
               <a:t>&lt;#&gt;</a:t>
             </a:fld>
           </a:p>
@@ -1488,7 +1488,7 @@
         <p:txBody>
           <a:bodyPr/>
           <a:p>
-            <a:fld id="{EA2CA333-2BB4-45D5-84D8-220ADB23DB2D}" type="slidenum">
+            <a:fld id="{0D636897-5FFD-4A95-9B32-7E8CEE7F94A1}" type="slidenum">
               <a:t>&lt;#&gt;</a:t>
             </a:fld>
           </a:p>
@@ -1611,7 +1611,7 @@
         <p:txBody>
           <a:bodyPr/>
           <a:p>
-            <a:fld id="{5A7ECBA1-769D-492D-9D27-12D072554AB8}" type="slidenum">
+            <a:fld id="{9984B547-8DDB-4FFA-90C9-39C4A5E9E2A6}" type="slidenum">
               <a:t>&lt;#&gt;</a:t>
             </a:fld>
           </a:p>
@@ -1732,7 +1732,7 @@
         <p:txBody>
           <a:bodyPr/>
           <a:p>
-            <a:fld id="{D904BCE1-4D8E-4069-8A2D-5CEBB2DF9810}" type="slidenum">
+            <a:fld id="{FF1E4643-E0A6-472C-AE4D-0CCC872300F8}" type="slidenum">
               <a:t>&lt;#&gt;</a:t>
             </a:fld>
           </a:p>
@@ -1984,7 +1984,7 @@
         <p:txBody>
           <a:bodyPr/>
           <a:p>
-            <a:fld id="{C822F1BD-E85D-4957-BD67-A421F9A9625B}" type="slidenum">
+            <a:fld id="{CC9D5A5F-29C8-4692-914E-121D90025962}" type="slidenum">
               <a:t>&lt;#&gt;</a:t>
             </a:fld>
           </a:p>
@@ -2236,7 +2236,7 @@
         <p:txBody>
           <a:bodyPr/>
           <a:p>
-            <a:fld id="{AC79A04A-31C4-4ED6-A35A-CB8AF6A6F4C0}" type="slidenum">
+            <a:fld id="{A66B8BF0-3A1B-49C9-AB97-71FD373C7162}" type="slidenum">
               <a:t>&lt;#&gt;</a:t>
             </a:fld>
           </a:p>
@@ -2488,7 +2488,7 @@
         <p:txBody>
           <a:bodyPr/>
           <a:p>
-            <a:fld id="{3B625A33-72D6-4DFE-9DB6-7F30DA85F7AA}" type="slidenum">
+            <a:fld id="{564BE485-28C7-47CC-A4CA-CC817A1C2720}" type="slidenum">
               <a:t>&lt;#&gt;</a:t>
             </a:fld>
           </a:p>
@@ -2973,7 +2973,7 @@
             <a:pPr indent="0" algn="r">
               <a:buNone/>
             </a:pPr>
-            <a:fld id="{89A28B0B-7A8A-4037-9C7A-C69242312CD3}" type="slidenum">
+            <a:fld id="{41F3879B-44DC-4CD8-9898-AC0A1679B9B1}" type="slidenum">
               <a:rPr b="0" lang="en-US" sz="1400" spc="-1" strike="noStrike">
                 <a:solidFill>
                   <a:srgbClr val="000000"/>

--- a/fixtures/nested.pptx
+++ b/fixtures/nested.pptx
@@ -65,7 +65,7 @@
         <p:txBody>
           <a:bodyPr/>
           <a:p>
-            <a:fld id="{8E0FD309-3A34-400C-8AA3-1D6B19D73EF4}" type="slidenum">
+            <a:fld id="{0C96A8FB-1C8F-4D9F-BF77-7BA20B8B5609}" type="slidenum">
               <a:t>&lt;#&gt;</a:t>
             </a:fld>
           </a:p>
@@ -274,7 +274,7 @@
         <p:txBody>
           <a:bodyPr/>
           <a:p>
-            <a:fld id="{ED3E80DE-FA04-4D45-999C-127B1C782D7E}" type="slidenum">
+            <a:fld id="{18C5CA6F-D04A-45DD-B156-89BB5EA4E404}" type="slidenum">
               <a:t>&lt;#&gt;</a:t>
             </a:fld>
           </a:p>
@@ -569,7 +569,7 @@
         <p:txBody>
           <a:bodyPr/>
           <a:p>
-            <a:fld id="{4FB39BA7-5E32-49DB-95B8-8A99FCD7DD57}" type="slidenum">
+            <a:fld id="{434CF70F-B1FD-4C1A-84EE-CF25FC2B0839}" type="slidenum">
               <a:t>&lt;#&gt;</a:t>
             </a:fld>
           </a:p>
@@ -950,7 +950,7 @@
         <p:txBody>
           <a:bodyPr/>
           <a:p>
-            <a:fld id="{2C99BB38-D8D9-4330-A87C-CE5BE3E04EE7}" type="slidenum">
+            <a:fld id="{B3E15AF5-83D6-435F-863F-E1CE4F0D5250}" type="slidenum">
               <a:t>&lt;#&gt;</a:t>
             </a:fld>
           </a:p>
@@ -1113,7 +1113,7 @@
         <p:txBody>
           <a:bodyPr/>
           <a:p>
-            <a:fld id="{D76DE987-1A74-4465-8FEF-392DFDD9ACEE}" type="slidenum">
+            <a:fld id="{4588120A-EFFC-4F1F-B3EA-D0E917CA236B}" type="slidenum">
               <a:t>&lt;#&gt;</a:t>
             </a:fld>
           </a:p>
@@ -1279,7 +1279,7 @@
         <p:txBody>
           <a:bodyPr/>
           <a:p>
-            <a:fld id="{FF22B709-6454-4169-B73E-F5CB5278880B}" type="slidenum">
+            <a:fld id="{7EBD30AF-390C-4C8D-9416-5EF8485CC874}" type="slidenum">
               <a:t>&lt;#&gt;</a:t>
             </a:fld>
           </a:p>
@@ -1488,7 +1488,7 @@
         <p:txBody>
           <a:bodyPr/>
           <a:p>
-            <a:fld id="{0D636897-5FFD-4A95-9B32-7E8CEE7F94A1}" type="slidenum">
+            <a:fld id="{28AA8571-843E-4FE0-AB55-4E754693F3C4}" type="slidenum">
               <a:t>&lt;#&gt;</a:t>
             </a:fld>
           </a:p>
@@ -1611,7 +1611,7 @@
         <p:txBody>
           <a:bodyPr/>
           <a:p>
-            <a:fld id="{9984B547-8DDB-4FFA-90C9-39C4A5E9E2A6}" type="slidenum">
+            <a:fld id="{4C4DCCB7-5241-43F5-A881-B4201F1B6F50}" type="slidenum">
               <a:t>&lt;#&gt;</a:t>
             </a:fld>
           </a:p>
@@ -1732,7 +1732,7 @@
         <p:txBody>
           <a:bodyPr/>
           <a:p>
-            <a:fld id="{FF1E4643-E0A6-472C-AE4D-0CCC872300F8}" type="slidenum">
+            <a:fld id="{592D72F8-F6AF-43BA-AC45-8C5F84285DFA}" type="slidenum">
               <a:t>&lt;#&gt;</a:t>
             </a:fld>
           </a:p>
@@ -1984,7 +1984,7 @@
         <p:txBody>
           <a:bodyPr/>
           <a:p>
-            <a:fld id="{CC9D5A5F-29C8-4692-914E-121D90025962}" type="slidenum">
+            <a:fld id="{90C2FA5C-4B0E-4A7D-9468-C252E2262B84}" type="slidenum">
               <a:t>&lt;#&gt;</a:t>
             </a:fld>
           </a:p>
@@ -2236,7 +2236,7 @@
         <p:txBody>
           <a:bodyPr/>
           <a:p>
-            <a:fld id="{A66B8BF0-3A1B-49C9-AB97-71FD373C7162}" type="slidenum">
+            <a:fld id="{97B348E0-B1E2-41D8-98EA-38252AFFC81E}" type="slidenum">
               <a:t>&lt;#&gt;</a:t>
             </a:fld>
           </a:p>
@@ -2488,7 +2488,7 @@
         <p:txBody>
           <a:bodyPr/>
           <a:p>
-            <a:fld id="{564BE485-28C7-47CC-A4CA-CC817A1C2720}" type="slidenum">
+            <a:fld id="{DF00FFF7-CD95-4B76-8AB1-6C8DB4767092}" type="slidenum">
               <a:t>&lt;#&gt;</a:t>
             </a:fld>
           </a:p>
@@ -2973,7 +2973,7 @@
             <a:pPr indent="0" algn="r">
               <a:buNone/>
             </a:pPr>
-            <a:fld id="{41F3879B-44DC-4CD8-9898-AC0A1679B9B1}" type="slidenum">
+            <a:fld id="{41383FE7-5474-4AE6-9BA2-4534CA930DA0}" type="slidenum">
               <a:rPr b="0" lang="en-US" sz="1400" spc="-1" strike="noStrike">
                 <a:solidFill>
                   <a:srgbClr val="000000"/>
